--- a/presentation/presentation.pptx
+++ b/presentation/presentation.pptx
@@ -7450,9 +7450,9 @@
         <p:grpSpPr>
           <a:xfrm>
             <a:off x="2131060" y="2167255"/>
-            <a:ext cx="7928610" cy="2523490"/>
+            <a:ext cx="7929245" cy="2523490"/>
             <a:chOff x="3356" y="3027"/>
-            <a:chExt cx="12486" cy="3974"/>
+            <a:chExt cx="12487" cy="3974"/>
           </a:xfrm>
         </p:grpSpPr>
         <p:sp>
@@ -7551,7 +7551,19 @@
                 <a:rPr lang="vi-VN" altLang="en-US">
                   <a:sym typeface="+mn-ea"/>
                 </a:rPr>
-                <a:t>Affilation</a:t>
+                <a:t>Affil</a:t>
+              </a:r>
+              <a:r>
+                <a:rPr lang="en-US" altLang="vi-VN">
+                  <a:sym typeface="+mn-ea"/>
+                </a:rPr>
+                <a:t>i</a:t>
+              </a:r>
+              <a:r>
+                <a:rPr lang="vi-VN" altLang="en-US">
+                  <a:sym typeface="+mn-ea"/>
+                </a:rPr>
+                <a:t>ation</a:t>
               </a:r>
               <a:endParaRPr lang="vi-VN" altLang="en-US">
                 <a:sym typeface="+mn-ea"/>
@@ -7878,7 +7890,7 @@
         <p:spPr>
           <a:xfrm>
             <a:off x="360045" y="360045"/>
-            <a:ext cx="2088515" cy="553085"/>
+            <a:ext cx="5585460" cy="553085"/>
           </a:xfrm>
           <a:prstGeom prst="rect">
             <a:avLst/>
@@ -7898,9 +7910,25 @@
               </a:rPr>
               <a:t>SAMPLE 1</a:t>
             </a:r>
-            <a:endParaRPr lang="vi-VN" altLang="en-US" sz="3000" b="1">
+            <a:r>
+              <a:rPr lang="en-US" altLang="vi-VN" sz="3000" b="1">
+                <a:solidFill>
+                  <a:srgbClr val="FF0000"/>
+                </a:solidFill>
+              </a:rPr>
+              <a:t> |</a:t>
+            </a:r>
+            <a:r>
+              <a:rPr lang="en-US" altLang="vi-VN" sz="3000" b="1">
+                <a:solidFill>
+                  <a:schemeClr val="tx1"/>
+                </a:solidFill>
+              </a:rPr>
+              <a:t> Oral Presentation</a:t>
+            </a:r>
+            <a:endParaRPr lang="en-US" altLang="vi-VN" sz="3000" b="1">
               <a:solidFill>
-                <a:srgbClr val="FF0000"/>
+                <a:schemeClr val="tx1"/>
               </a:solidFill>
             </a:endParaRPr>
           </a:p>
@@ -8071,9 +8099,9 @@
         <p:grpSpPr>
           <a:xfrm>
             <a:off x="763905" y="1888490"/>
-            <a:ext cx="10664190" cy="3081020"/>
+            <a:ext cx="10664190" cy="3357880"/>
             <a:chOff x="1203" y="3027"/>
-            <a:chExt cx="16794" cy="4852"/>
+            <a:chExt cx="16794" cy="5288"/>
           </a:xfrm>
         </p:grpSpPr>
         <p:sp>
@@ -8138,8 +8166,8 @@
           </p:nvSpPr>
           <p:spPr>
             <a:xfrm>
-              <a:off x="4063" y="5985"/>
-              <a:ext cx="11074" cy="580"/>
+              <a:off x="3986" y="5985"/>
+              <a:ext cx="11230" cy="580"/>
             </a:xfrm>
             <a:prstGeom prst="rect">
               <a:avLst/>
@@ -8174,13 +8202,7 @@
                 <a:rPr lang="vi-VN" altLang="en-US" b="1">
                   <a:sym typeface="+mn-ea"/>
                 </a:rPr>
-                <a:t>, </a:t>
-              </a:r>
-              <a:r>
-                <a:rPr lang="vi-VN" altLang="en-US" b="1">
-                  <a:sym typeface="+mn-ea"/>
-                </a:rPr>
-                <a:t>Nguy</a:t>
+                <a:t>, Nguy</a:t>
               </a:r>
               <a:r>
                 <a:rPr lang="en-US" altLang="vi-VN" b="1">
@@ -8198,13 +8220,7 @@
                 <a:rPr lang="vi-VN" altLang="en-US" b="1">
                   <a:sym typeface="+mn-ea"/>
                 </a:rPr>
-                <a:t>, </a:t>
-              </a:r>
-              <a:r>
-                <a:rPr lang="vi-VN" altLang="en-US" b="1">
-                  <a:sym typeface="+mn-ea"/>
-                </a:rPr>
-                <a:t>Nguy</a:t>
+                <a:t>, Nguy</a:t>
               </a:r>
               <a:r>
                 <a:rPr lang="en-US" altLang="vi-VN" b="1">
@@ -8222,13 +8238,7 @@
                 <a:rPr lang="vi-VN" altLang="en-US" b="1">
                   <a:sym typeface="+mn-ea"/>
                 </a:rPr>
-                <a:t>, </a:t>
-              </a:r>
-              <a:r>
-                <a:rPr lang="vi-VN" altLang="en-US" b="1">
-                  <a:sym typeface="+mn-ea"/>
-                </a:rPr>
-                <a:t>Nguy</a:t>
+                <a:t>, Nguy</a:t>
               </a:r>
               <a:r>
                 <a:rPr lang="en-US" altLang="vi-VN" b="1">
@@ -8242,7 +8252,13 @@
                 </a:rPr>
                 <a:t>2</a:t>
               </a:r>
-              <a:endParaRPr lang="vi-VN" altLang="en-US" b="1">
+              <a:r>
+                <a:rPr lang="en-US" altLang="vi-VN" b="1" baseline="30000">
+                  <a:sym typeface="+mn-ea"/>
+                </a:rPr>
+                <a:t>,*</a:t>
+              </a:r>
+              <a:endParaRPr lang="en-US" altLang="vi-VN" b="1" baseline="30000">
                 <a:sym typeface="+mn-ea"/>
               </a:endParaRPr>
             </a:p>
@@ -8257,7 +8273,7 @@
           <p:spPr>
             <a:xfrm>
               <a:off x="2231" y="6863"/>
-              <a:ext cx="14735" cy="1016"/>
+              <a:ext cx="14735" cy="1452"/>
             </a:xfrm>
             <a:prstGeom prst="rect">
               <a:avLst/>
@@ -8318,7 +8334,27 @@
                 </a:rPr>
                 <a:t>y</a:t>
               </a:r>
-              <a:endParaRPr lang="vi-VN" altLang="en-US"/>
+              <a:endParaRPr lang="vi-VN" altLang="en-US">
+                <a:sym typeface="+mn-ea"/>
+              </a:endParaRPr>
+            </a:p>
+            <a:p>
+              <a:pPr algn="ctr"/>
+              <a:r>
+                <a:rPr lang="en-US" altLang="vi-VN" b="1" baseline="30000">
+                  <a:sym typeface="+mn-ea"/>
+                </a:rPr>
+                <a:t>*</a:t>
+              </a:r>
+              <a:r>
+                <a:rPr lang="en-US" altLang="vi-VN">
+                  <a:sym typeface="+mn-ea"/>
+                </a:rPr>
+                <a:t>Lecturer/Supervisor</a:t>
+              </a:r>
+              <a:endParaRPr lang="en-US" altLang="vi-VN">
+                <a:sym typeface="+mn-ea"/>
+              </a:endParaRPr>
             </a:p>
           </p:txBody>
         </p:sp>
@@ -8580,9 +8616,9 @@
         <p:grpSpPr>
           <a:xfrm>
             <a:off x="1416685" y="2026920"/>
-            <a:ext cx="9356725" cy="2804160"/>
+            <a:ext cx="9356725" cy="3081020"/>
             <a:chOff x="2231" y="3027"/>
-            <a:chExt cx="14735" cy="4416"/>
+            <a:chExt cx="14735" cy="4852"/>
           </a:xfrm>
         </p:grpSpPr>
         <p:sp>
@@ -8647,8 +8683,8 @@
           </p:nvSpPr>
           <p:spPr>
             <a:xfrm>
-              <a:off x="6813" y="5985"/>
-              <a:ext cx="5574" cy="580"/>
+              <a:off x="6736" y="5985"/>
+              <a:ext cx="5730" cy="580"/>
             </a:xfrm>
             <a:prstGeom prst="rect">
               <a:avLst/>
@@ -8709,7 +8745,13 @@
                 </a:rPr>
                 <a:t>1</a:t>
               </a:r>
-              <a:endParaRPr lang="vi-VN" altLang="en-US" b="1">
+              <a:r>
+                <a:rPr lang="en-US" altLang="vi-VN" b="1" baseline="30000">
+                  <a:sym typeface="+mn-ea"/>
+                </a:rPr>
+                <a:t>,*</a:t>
+              </a:r>
+              <a:endParaRPr lang="en-US" altLang="vi-VN" b="1" baseline="30000">
                 <a:sym typeface="+mn-ea"/>
               </a:endParaRPr>
             </a:p>
@@ -8724,7 +8766,7 @@
           <p:spPr>
             <a:xfrm>
               <a:off x="2231" y="6863"/>
-              <a:ext cx="14735" cy="580"/>
+              <a:ext cx="14735" cy="1016"/>
             </a:xfrm>
             <a:prstGeom prst="rect">
               <a:avLst/>
@@ -8748,6 +8790,24 @@
                   <a:sym typeface="+mn-ea"/>
                 </a:rPr>
                 <a:t>Faculty of Information Technology, Ton Duc Thang University</a:t>
+              </a:r>
+              <a:endParaRPr lang="en-US" altLang="vi-VN">
+                <a:sym typeface="+mn-ea"/>
+              </a:endParaRPr>
+            </a:p>
+            <a:p>
+              <a:pPr algn="ctr"/>
+              <a:r>
+                <a:rPr lang="en-US" altLang="vi-VN" b="1" baseline="30000">
+                  <a:sym typeface="+mn-ea"/>
+                </a:rPr>
+                <a:t>*</a:t>
+              </a:r>
+              <a:r>
+                <a:rPr lang="en-US" altLang="vi-VN">
+                  <a:sym typeface="+mn-ea"/>
+                </a:rPr>
+                <a:t>Lecturer/Supervisor</a:t>
               </a:r>
               <a:endParaRPr lang="vi-VN" altLang="en-US"/>
             </a:p>
@@ -8801,7 +8861,7 @@
         <p:spPr>
           <a:xfrm>
             <a:off x="360045" y="360045"/>
-            <a:ext cx="2088515" cy="553085"/>
+            <a:ext cx="7301230" cy="553085"/>
           </a:xfrm>
           <a:prstGeom prst="rect">
             <a:avLst/>
@@ -8821,9 +8881,25 @@
               </a:rPr>
               <a:t>SAMPLE 3</a:t>
             </a:r>
-            <a:endParaRPr lang="vi-VN" altLang="en-US" sz="3000" b="1">
+            <a:r>
+              <a:rPr lang="en-US" altLang="vi-VN" sz="3000" b="1">
+                <a:solidFill>
+                  <a:srgbClr val="FF0000"/>
+                </a:solidFill>
+              </a:rPr>
+              <a:t> | </a:t>
+            </a:r>
+            <a:r>
+              <a:rPr lang="en-US" altLang="vi-VN" sz="3000" b="1">
+                <a:solidFill>
+                  <a:schemeClr val="tx1"/>
+                </a:solidFill>
+              </a:rPr>
+              <a:t>Final/Midterm Presentation</a:t>
+            </a:r>
+            <a:endParaRPr lang="en-US" altLang="vi-VN" sz="3000" b="1">
               <a:solidFill>
-                <a:srgbClr val="FF0000"/>
+                <a:schemeClr val="tx1"/>
               </a:solidFill>
             </a:endParaRPr>
           </a:p>
